--- a/stage2_intermediate/04_overfitting_crossval/Lecture-9-Overfitting-CrossValidation.pptx
+++ b/stage2_intermediate/04_overfitting_crossval/Lecture-9-Overfitting-CrossValidation.pptx
@@ -8310,6 +8310,9 @@
           <a:lstStyle/>
           <a:p>
             <a:r>
+              <a:rPr>
+                <a:latin typeface="Calibri"/>
+              </a:rPr>
               <a:t>AI Basic Training</a:t>
             </a:r>
           </a:p>
@@ -8331,6 +8334,9 @@
           <a:lstStyle/>
           <a:p>
             <a:r>
+              <a:rPr>
+                <a:latin typeface="Calibri"/>
+              </a:rPr>
               <a:t>Lesson 2.4  |  Stage 2: Intermediate ML</a:t>
             </a:r>
           </a:p>
@@ -8352,6 +8358,9 @@
           <a:lstStyle/>
           <a:p>
             <a:r>
+              <a:rPr b="1">
+                <a:latin typeface="Calibri"/>
+              </a:rPr>
               <a:t>Cross-Validation &amp; Overfitting</a:t>
             </a:r>
           </a:p>
@@ -8373,6 +8382,9 @@
           <a:lstStyle/>
           <a:p>
             <a:r>
+              <a:rPr>
+                <a:latin typeface="Calibri"/>
+              </a:rPr>
               <a:t>Does Your Model Actually Generalise?</a:t>
             </a:r>
           </a:p>
@@ -8412,6 +8424,9 @@
           <a:lstStyle/>
           <a:p>
             <a:r>
+              <a:rPr b="1">
+                <a:latin typeface="Calibri"/>
+              </a:rPr>
               <a:t>Rotate the Evaluation Fold for a Reliable Estimate</a:t>
             </a:r>
           </a:p>
@@ -8475,6 +8490,9 @@
           <a:lstStyle/>
           <a:p>
             <a:r>
+              <a:rPr b="1">
+                <a:latin typeface="Calibri"/>
+              </a:rPr>
               <a:t>The Code - Two Lines</a:t>
             </a:r>
           </a:p>
@@ -8496,67 +8514,89 @@
           <a:lstStyle/>
           <a:p>
             <a:r>
-              <a:rPr sz="1500"/>
+              <a:rPr sz="1500">
+                <a:latin typeface="Calibri"/>
+              </a:rPr>
               <a:t>from sklearn.model_selection import cross_val_score</a:t>
             </a:r>
           </a:p>
           <a:p>
             <a:r>
-              <a:rPr sz="1500"/>
+              <a:rPr sz="1500">
+                <a:latin typeface="Calibri"/>
+              </a:rPr>
               <a:t/>
             </a:r>
           </a:p>
           <a:p>
             <a:r>
-              <a:rPr sz="1500"/>
+              <a:rPr sz="1500">
+                <a:latin typeface="Calibri"/>
+              </a:rPr>
               <a:t>scores = cross_val_score(model, X, y, cv=5, scoring='roc_auc')</a:t>
             </a:r>
           </a:p>
           <a:p>
             <a:r>
-              <a:rPr sz="1500"/>
+              <a:rPr sz="1500">
+                <a:latin typeface="Calibri"/>
+              </a:rPr>
               <a:t/>
             </a:r>
           </a:p>
           <a:p>
             <a:r>
-              <a:rPr sz="1500"/>
+              <a:rPr sz="1500">
+                <a:latin typeface="Calibri"/>
+              </a:rPr>
               <a:t>print(f'AUC: {scores.mean():.4f} +/- {scores.std():.4f}')</a:t>
             </a:r>
           </a:p>
           <a:p>
             <a:r>
-              <a:rPr sz="1500"/>
+              <a:rPr sz="1500">
+                <a:latin typeface="Calibri"/>
+              </a:rPr>
               <a:t/>
             </a:r>
           </a:p>
           <a:p>
             <a:r>
-              <a:rPr sz="1500"/>
+              <a:rPr sz="1500">
+                <a:latin typeface="Calibri"/>
+              </a:rPr>
               <a:t>Low std = stable across splits = trustworthy</a:t>
             </a:r>
           </a:p>
           <a:p>
             <a:r>
-              <a:rPr sz="1500"/>
+              <a:rPr sz="1500">
+                <a:latin typeface="Calibri"/>
+              </a:rPr>
               <a:t>High std = model is sensitive to which data it sees</a:t>
             </a:r>
           </a:p>
           <a:p>
             <a:r>
-              <a:rPr sz="1500"/>
+              <a:rPr sz="1500">
+                <a:latin typeface="Calibri"/>
+              </a:rPr>
               <a:t/>
             </a:r>
           </a:p>
           <a:p>
             <a:r>
-              <a:rPr sz="1500"/>
+              <a:rPr sz="1500">
+                <a:latin typeface="Calibri"/>
+              </a:rPr>
               <a:t>5 or 10 folds is standard</a:t>
             </a:r>
           </a:p>
           <a:p>
             <a:r>
-              <a:rPr sz="1500"/>
+              <a:rPr sz="1500">
+                <a:latin typeface="Calibri"/>
+              </a:rPr>
               <a:t>  5 = faster, 10 = slightly more reliable</a:t>
             </a:r>
           </a:p>
@@ -8596,11 +8636,17 @@
           <a:lstStyle/>
           <a:p>
             <a:r>
+              <a:rPr b="1">
+                <a:latin typeface="Calibri"/>
+              </a:rPr>
               <a:t>Regularisation</a:t>
             </a:r>
           </a:p>
           <a:p>
             <a:r>
+              <a:rPr b="1">
+                <a:latin typeface="Calibri"/>
+              </a:rPr>
               <a:t>Techniques</a:t>
             </a:r>
           </a:p>
@@ -8622,6 +8668,9 @@
           <a:lstStyle/>
           <a:p>
             <a:r>
+              <a:rPr b="1">
+                <a:latin typeface="Calibri"/>
+              </a:rPr>
               <a:t>04</a:t>
             </a:r>
           </a:p>
@@ -8661,6 +8710,9 @@
           <a:lstStyle/>
           <a:p>
             <a:r>
+              <a:rPr b="1">
+                <a:latin typeface="Calibri"/>
+              </a:rPr>
               <a:t>Regularisation: One Technique Per Model Family</a:t>
             </a:r>
           </a:p>
@@ -8724,11 +8776,17 @@
           <a:lstStyle/>
           <a:p>
             <a:r>
+              <a:rPr b="1">
+                <a:latin typeface="Calibri"/>
+              </a:rPr>
               <a:t>Workshop</a:t>
             </a:r>
           </a:p>
           <a:p>
             <a:r>
+              <a:rPr b="1">
+                <a:latin typeface="Calibri"/>
+              </a:rPr>
               <a:t>and Next Steps</a:t>
             </a:r>
           </a:p>
@@ -8750,6 +8808,9 @@
           <a:lstStyle/>
           <a:p>
             <a:r>
+              <a:rPr b="1">
+                <a:latin typeface="Calibri"/>
+              </a:rPr>
               <a:t>05</a:t>
             </a:r>
           </a:p>
@@ -8789,6 +8850,9 @@
           <a:lstStyle/>
           <a:p>
             <a:r>
+              <a:rPr b="1">
+                <a:latin typeface="Calibri"/>
+              </a:rPr>
               <a:t>Workshop: 4 Hands-On Exercises</a:t>
             </a:r>
           </a:p>
@@ -8810,37 +8874,49 @@
           <a:lstStyle/>
           <a:p>
             <a:r>
-              <a:rPr sz="1600"/>
+              <a:rPr sz="1600">
+                <a:latin typeface="Calibri"/>
+              </a:rPr>
               <a:t>Exercise 1:  Overfitting demo - watch train vs val accuracy diverge</a:t>
             </a:r>
           </a:p>
           <a:p>
             <a:r>
-              <a:rPr sz="1600"/>
+              <a:rPr sz="1600">
+                <a:latin typeface="Calibri"/>
+              </a:rPr>
               <a:t>Exercise 2:  Bias-variance - visualise underfit, good fit, overfit models</a:t>
             </a:r>
           </a:p>
           <a:p>
             <a:r>
-              <a:rPr sz="1600"/>
+              <a:rPr sz="1600">
+                <a:latin typeface="Calibri"/>
+              </a:rPr>
               <a:t>Exercise 3:  K-fold cross-validation - compare to single train/test split</a:t>
             </a:r>
           </a:p>
           <a:p>
             <a:r>
-              <a:rPr sz="1600"/>
+              <a:rPr sz="1600">
+                <a:latin typeface="Calibri"/>
+              </a:rPr>
               <a:t>Exercise 4:  Validation curve - automatic parameter sweep to find sweet spot</a:t>
             </a:r>
           </a:p>
           <a:p>
             <a:r>
-              <a:rPr sz="1600"/>
+              <a:rPr sz="1600">
+                <a:latin typeface="Calibri"/>
+              </a:rPr>
               <a:t/>
             </a:r>
           </a:p>
           <a:p>
             <a:r>
-              <a:rPr sz="1600"/>
+              <a:rPr sz="1600">
+                <a:latin typeface="Calibri"/>
+              </a:rPr>
               <a:t>Each exercise: lecture.md + handson.md + solution file</a:t>
             </a:r>
           </a:p>
@@ -8880,37 +8956,49 @@
           <a:lstStyle/>
           <a:p>
             <a:r>
-              <a:rPr sz="1500"/>
+              <a:rPr sz="1500">
+                <a:latin typeface="Calibri"/>
+              </a:rPr>
               <a:t>Overfitting = large gap between train and test performance</a:t>
             </a:r>
           </a:p>
           <a:p>
             <a:r>
-              <a:rPr sz="1500"/>
+              <a:rPr sz="1500">
+                <a:latin typeface="Calibri"/>
+              </a:rPr>
               <a:t>The bias-variance tradeoff: find the complexity sweet spot</a:t>
             </a:r>
           </a:p>
           <a:p>
             <a:r>
-              <a:rPr sz="1500"/>
+              <a:rPr sz="1500">
+                <a:latin typeface="Calibri"/>
+              </a:rPr>
               <a:t>Cross-validation gives reliable estimates - better than a single split</a:t>
             </a:r>
           </a:p>
           <a:p>
             <a:r>
-              <a:rPr sz="1500"/>
+              <a:rPr sz="1500">
+                <a:latin typeface="Calibri"/>
+              </a:rPr>
               <a:t>Low std across folds = trustworthy model</a:t>
             </a:r>
           </a:p>
           <a:p>
             <a:r>
-              <a:rPr sz="1500"/>
+              <a:rPr sz="1500">
+                <a:latin typeface="Calibri"/>
+              </a:rPr>
               <a:t>Every model family has regularisation tools to control overfitting</a:t>
             </a:r>
           </a:p>
           <a:p>
             <a:r>
-              <a:rPr sz="1500"/>
+              <a:rPr sz="1500">
+                <a:latin typeface="Calibri"/>
+              </a:rPr>
               <a:t>Next: Stage 3 - Neural Networks (where overfitting gets serious)</a:t>
             </a:r>
           </a:p>
@@ -8932,11 +9020,17 @@
           <a:lstStyle/>
           <a:p>
             <a:r>
+              <a:rPr b="1">
+                <a:latin typeface="Calibri"/>
+              </a:rPr>
               <a:t>Key</a:t>
             </a:r>
           </a:p>
           <a:p>
             <a:r>
+              <a:rPr b="1">
+                <a:latin typeface="Calibri"/>
+              </a:rPr>
               <a:t>Takeaways</a:t>
             </a:r>
           </a:p>
@@ -8976,6 +9070,9 @@
           <a:lstStyle/>
           <a:p>
             <a:r>
+              <a:rPr>
+                <a:latin typeface="Calibri"/>
+              </a:rPr>
               <a:t>Next:  Stage 3 - Neural Networks</a:t>
             </a:r>
           </a:p>
@@ -8997,6 +9094,9 @@
           <a:lstStyle/>
           <a:p>
             <a:r>
+              <a:rPr b="1">
+                <a:latin typeface="Calibri"/>
+              </a:rPr>
               <a:t>Cross-Validation &amp; Overfitting</a:t>
             </a:r>
           </a:p>
@@ -9036,31 +9136,41 @@
           <a:lstStyle/>
           <a:p>
             <a:r>
-              <a:rPr sz="1600"/>
+              <a:rPr sz="1600">
+                <a:latin typeface="Calibri"/>
+              </a:rPr>
               <a:t>Overfitting - when the model memorises instead of learns</a:t>
             </a:r>
           </a:p>
           <a:p>
             <a:r>
-              <a:rPr sz="1600"/>
+              <a:rPr sz="1600">
+                <a:latin typeface="Calibri"/>
+              </a:rPr>
               <a:t>The bias-variance tradeoff</a:t>
             </a:r>
           </a:p>
           <a:p>
             <a:r>
-              <a:rPr sz="1600"/>
+              <a:rPr sz="1600">
+                <a:latin typeface="Calibri"/>
+              </a:rPr>
               <a:t>K-fold cross-validation - reliable performance estimates</a:t>
             </a:r>
           </a:p>
           <a:p>
             <a:r>
-              <a:rPr sz="1600"/>
+              <a:rPr sz="1600">
+                <a:latin typeface="Calibri"/>
+              </a:rPr>
               <a:t>Regularisation techniques for every model type</a:t>
             </a:r>
           </a:p>
           <a:p>
             <a:r>
-              <a:rPr sz="1600"/>
+              <a:rPr sz="1600">
+                <a:latin typeface="Calibri"/>
+              </a:rPr>
               <a:t>Finding the sweet spot</a:t>
             </a:r>
           </a:p>
@@ -9082,6 +9192,9 @@
           <a:lstStyle/>
           <a:p>
             <a:r>
+              <a:rPr b="1">
+                <a:latin typeface="Calibri"/>
+              </a:rPr>
               <a:t>What We'll Cover</a:t>
             </a:r>
           </a:p>
@@ -9121,11 +9234,17 @@
           <a:lstStyle/>
           <a:p>
             <a:r>
+              <a:rPr b="1">
+                <a:latin typeface="Calibri"/>
+              </a:rPr>
               <a:t>What is</a:t>
             </a:r>
           </a:p>
           <a:p>
             <a:r>
+              <a:rPr b="1">
+                <a:latin typeface="Calibri"/>
+              </a:rPr>
               <a:t>Overfitting?</a:t>
             </a:r>
           </a:p>
@@ -9147,6 +9266,9 @@
           <a:lstStyle/>
           <a:p>
             <a:r>
+              <a:rPr b="1">
+                <a:latin typeface="Calibri"/>
+              </a:rPr>
               <a:t>01</a:t>
             </a:r>
           </a:p>
@@ -9186,6 +9308,9 @@
           <a:lstStyle/>
           <a:p>
             <a:r>
+              <a:rPr b="1">
+                <a:latin typeface="Calibri"/>
+              </a:rPr>
               <a:t>Train vs Validation: The Gap Is the Problem</a:t>
             </a:r>
           </a:p>
@@ -9249,6 +9374,9 @@
           <a:lstStyle/>
           <a:p>
             <a:r>
+              <a:rPr b="1">
+                <a:latin typeface="Calibri"/>
+              </a:rPr>
               <a:t>Overfitting vs Underfitting</a:t>
             </a:r>
           </a:p>
@@ -9270,49 +9398,65 @@
           <a:lstStyle/>
           <a:p>
             <a:r>
-              <a:rPr sz="1400"/>
+              <a:rPr sz="1400">
+                <a:latin typeface="Calibri"/>
+              </a:rPr>
               <a:t>Overfitting</a:t>
             </a:r>
           </a:p>
           <a:p>
             <a:r>
-              <a:rPr sz="1400"/>
+              <a:rPr sz="1400">
+                <a:latin typeface="Calibri"/>
+              </a:rPr>
               <a:t/>
             </a:r>
           </a:p>
           <a:p>
             <a:r>
-              <a:rPr sz="1400"/>
+              <a:rPr sz="1400">
+                <a:latin typeface="Calibri"/>
+              </a:rPr>
               <a:t>Train accuracy: 99.8%</a:t>
             </a:r>
           </a:p>
           <a:p>
             <a:r>
-              <a:rPr sz="1400"/>
+              <a:rPr sz="1400">
+                <a:latin typeface="Calibri"/>
+              </a:rPr>
               <a:t>Test accuracy: 71.2%</a:t>
             </a:r>
           </a:p>
           <a:p>
             <a:r>
-              <a:rPr sz="1400"/>
+              <a:rPr sz="1400">
+                <a:latin typeface="Calibri"/>
+              </a:rPr>
               <a:t/>
             </a:r>
           </a:p>
           <a:p>
             <a:r>
-              <a:rPr sz="1400"/>
+              <a:rPr sz="1400">
+                <a:latin typeface="Calibri"/>
+              </a:rPr>
               <a:t>Large gap</a:t>
             </a:r>
           </a:p>
           <a:p>
             <a:r>
-              <a:rPr sz="1400"/>
+              <a:rPr sz="1400">
+                <a:latin typeface="Calibri"/>
+              </a:rPr>
               <a:t>Model memorised noise</a:t>
             </a:r>
           </a:p>
           <a:p>
             <a:r>
-              <a:rPr sz="1400"/>
+              <a:rPr sz="1400">
+                <a:latin typeface="Calibri"/>
+              </a:rPr>
               <a:t>Too complex for the data</a:t>
             </a:r>
           </a:p>
@@ -9334,49 +9478,65 @@
           <a:lstStyle/>
           <a:p>
             <a:r>
-              <a:rPr sz="1400"/>
+              <a:rPr sz="1400">
+                <a:latin typeface="Calibri"/>
+              </a:rPr>
               <a:t>Underfitting</a:t>
             </a:r>
           </a:p>
           <a:p>
             <a:r>
-              <a:rPr sz="1400"/>
+              <a:rPr sz="1400">
+                <a:latin typeface="Calibri"/>
+              </a:rPr>
               <a:t/>
             </a:r>
           </a:p>
           <a:p>
             <a:r>
-              <a:rPr sz="1400"/>
+              <a:rPr sz="1400">
+                <a:latin typeface="Calibri"/>
+              </a:rPr>
               <a:t>Train accuracy: 65%</a:t>
             </a:r>
           </a:p>
           <a:p>
             <a:r>
-              <a:rPr sz="1400"/>
+              <a:rPr sz="1400">
+                <a:latin typeface="Calibri"/>
+              </a:rPr>
               <a:t>Test accuracy: 64%</a:t>
             </a:r>
           </a:p>
           <a:p>
             <a:r>
-              <a:rPr sz="1400"/>
+              <a:rPr sz="1400">
+                <a:latin typeface="Calibri"/>
+              </a:rPr>
               <a:t/>
             </a:r>
           </a:p>
           <a:p>
             <a:r>
-              <a:rPr sz="1400"/>
+              <a:rPr sz="1400">
+                <a:latin typeface="Calibri"/>
+              </a:rPr>
               <a:t>Small gap - but both poor</a:t>
             </a:r>
           </a:p>
           <a:p>
             <a:r>
-              <a:rPr sz="1400"/>
+              <a:rPr sz="1400">
+                <a:latin typeface="Calibri"/>
+              </a:rPr>
               <a:t>Model hasn't learned enough</a:t>
             </a:r>
           </a:p>
           <a:p>
             <a:r>
-              <a:rPr sz="1400"/>
+              <a:rPr sz="1400">
+                <a:latin typeface="Calibri"/>
+              </a:rPr>
               <a:t>Too simple for the pattern</a:t>
             </a:r>
           </a:p>
@@ -9416,11 +9576,17 @@
           <a:lstStyle/>
           <a:p>
             <a:r>
+              <a:rPr b="1">
+                <a:latin typeface="Calibri"/>
+              </a:rPr>
               <a:t>The Bias-Variance</a:t>
             </a:r>
           </a:p>
           <a:p>
             <a:r>
+              <a:rPr b="1">
+                <a:latin typeface="Calibri"/>
+              </a:rPr>
               <a:t>Tradeoff</a:t>
             </a:r>
           </a:p>
@@ -9442,6 +9608,9 @@
           <a:lstStyle/>
           <a:p>
             <a:r>
+              <a:rPr b="1">
+                <a:latin typeface="Calibri"/>
+              </a:rPr>
               <a:t>02</a:t>
             </a:r>
           </a:p>
@@ -9481,6 +9650,9 @@
           <a:lstStyle/>
           <a:p>
             <a:r>
+              <a:rPr b="1">
+                <a:latin typeface="Calibri"/>
+              </a:rPr>
               <a:t>Three Regimes: Underfit, Sweet Spot, Overfit</a:t>
             </a:r>
           </a:p>
@@ -9544,6 +9716,9 @@
           <a:lstStyle/>
           <a:p>
             <a:r>
+              <a:rPr>
+                <a:latin typeface="Calibri"/>
+              </a:rPr>
               <a:t/>
             </a:r>
           </a:p>
@@ -9565,37 +9740,49 @@
           <a:lstStyle/>
           <a:p>
             <a:r>
-              <a:rPr sz="1400"/>
+              <a:rPr sz="1400">
+                <a:latin typeface="Calibri"/>
+              </a:rPr>
               <a:t>A model that scores 99%</a:t>
             </a:r>
           </a:p>
           <a:p>
             <a:r>
-              <a:rPr sz="1400"/>
+              <a:rPr sz="1400">
+                <a:latin typeface="Calibri"/>
+              </a:rPr>
               <a:t>on training data but 70%</a:t>
             </a:r>
           </a:p>
           <a:p>
             <a:r>
-              <a:rPr sz="1400"/>
+              <a:rPr sz="1400">
+                <a:latin typeface="Calibri"/>
+              </a:rPr>
               <a:t>on new data is useless.</a:t>
             </a:r>
           </a:p>
           <a:p>
             <a:r>
-              <a:rPr sz="1400"/>
+              <a:rPr sz="1400">
+                <a:latin typeface="Calibri"/>
+              </a:rPr>
               <a:t/>
             </a:r>
           </a:p>
           <a:p>
             <a:r>
-              <a:rPr sz="1400"/>
+              <a:rPr sz="1400">
+                <a:latin typeface="Calibri"/>
+              </a:rPr>
               <a:t>It memorised rather</a:t>
             </a:r>
           </a:p>
           <a:p>
             <a:r>
-              <a:rPr sz="1400"/>
+              <a:rPr sz="1400">
+                <a:latin typeface="Calibri"/>
+              </a:rPr>
               <a:t>than learned.</a:t>
             </a:r>
           </a:p>
@@ -9617,6 +9804,9 @@
           <a:lstStyle/>
           <a:p>
             <a:r>
+              <a:rPr b="1">
+                <a:latin typeface="Calibri"/>
+              </a:rPr>
               <a:t>The Most Important Concept Before Neural Networks</a:t>
             </a:r>
           </a:p>
@@ -9638,49 +9828,65 @@
           <a:lstStyle/>
           <a:p>
             <a:r>
-              <a:rPr sz="1400"/>
+              <a:rPr sz="1400">
+                <a:latin typeface="Calibri"/>
+              </a:rPr>
               <a:t>High bias = model too simple</a:t>
             </a:r>
           </a:p>
           <a:p>
             <a:r>
-              <a:rPr sz="1400"/>
+              <a:rPr sz="1400">
+                <a:latin typeface="Calibri"/>
+              </a:rPr>
               <a:t>  Misses real patterns in the data</a:t>
             </a:r>
           </a:p>
           <a:p>
             <a:r>
-              <a:rPr sz="1400"/>
+              <a:rPr sz="1400">
+                <a:latin typeface="Calibri"/>
+              </a:rPr>
               <a:t/>
             </a:r>
           </a:p>
           <a:p>
             <a:r>
-              <a:rPr sz="1400"/>
+              <a:rPr sz="1400">
+                <a:latin typeface="Calibri"/>
+              </a:rPr>
               <a:t>High variance = model too complex</a:t>
             </a:r>
           </a:p>
           <a:p>
             <a:r>
-              <a:rPr sz="1400"/>
+              <a:rPr sz="1400">
+                <a:latin typeface="Calibri"/>
+              </a:rPr>
               <a:t>  Fits noise that doesn't generalise</a:t>
             </a:r>
           </a:p>
           <a:p>
             <a:r>
-              <a:rPr sz="1400"/>
+              <a:rPr sz="1400">
+                <a:latin typeface="Calibri"/>
+              </a:rPr>
               <a:t/>
             </a:r>
           </a:p>
           <a:p>
             <a:r>
-              <a:rPr sz="1400"/>
+              <a:rPr sz="1400">
+                <a:latin typeface="Calibri"/>
+              </a:rPr>
               <a:t>Goal: lowest test error</a:t>
             </a:r>
           </a:p>
           <a:p>
             <a:r>
-              <a:rPr sz="1400"/>
+              <a:rPr sz="1400">
+                <a:latin typeface="Calibri"/>
+              </a:rPr>
               <a:t>  Not lowest training error</a:t>
             </a:r>
           </a:p>
@@ -9720,11 +9926,17 @@
           <a:lstStyle/>
           <a:p>
             <a:r>
+              <a:rPr b="1">
+                <a:latin typeface="Calibri"/>
+              </a:rPr>
               <a:t>K-Fold</a:t>
             </a:r>
           </a:p>
           <a:p>
             <a:r>
+              <a:rPr b="1">
+                <a:latin typeface="Calibri"/>
+              </a:rPr>
               <a:t>Cross-Validation</a:t>
             </a:r>
           </a:p>
@@ -9746,6 +9958,9 @@
           <a:lstStyle/>
           <a:p>
             <a:r>
+              <a:rPr b="1">
+                <a:latin typeface="Calibri"/>
+              </a:rPr>
               <a:t>03</a:t>
             </a:r>
           </a:p>
